--- a/Clase_11/PPT/Clase11_PCA_Interpretacion.pptx
+++ b/Clase_11/PPT/Clase11_PCA_Interpretacion.pptx
@@ -6785,7 +6785,7 @@
         </p:nvSpPr>
         <p:spPr>
           <a:xfrm>
-            <a:off x="4663440" y="1078992"/>
+            <a:off x="4709160" y="1078992"/>
             <a:ext cx="4160520" cy="3822192"/>
           </a:xfrm>
           <a:prstGeom prst="rect">
@@ -10431,7 +10431,7 @@
         </p:nvSpPr>
         <p:spPr>
           <a:xfrm>
-            <a:off x="4224528" y="4956048"/>
+            <a:off x="4206240" y="5024628"/>
             <a:ext cx="4462272" cy="164592"/>
           </a:xfrm>
           <a:prstGeom prst="rect">
